--- a/liveries/ucp/template.pptx
+++ b/liveries/ucp/template.pptx
@@ -4315,5 +4315,25 @@
   </a:themeElements>
   <a:objectDefaults/>
   <a:extraClrSchemeLst/>
+  <a:custClrLst>
+    <a:custClr name="Data 1 · Teal">
+      <a:srgbClr val="00A2B4"/>
+    </a:custClr>
+    <a:custClr name="Data 2 · Orange">
+      <a:srgbClr val="E0681A"/>
+    </a:custClr>
+    <a:custClr name="Data 3 · Blue">
+      <a:srgbClr val="0057C2"/>
+    </a:custClr>
+    <a:custClr name="Data 4 · Pink">
+      <a:srgbClr val="D4246B"/>
+    </a:custClr>
+    <a:custClr name="Data 5 · Gold">
+      <a:srgbClr val="9A7B00"/>
+    </a:custClr>
+    <a:custClr name="Data 6 · Purple">
+      <a:srgbClr val="6B46C1"/>
+    </a:custClr>
+  </a:custClrLst>
 </a:theme>
 </file>
--- a/liveries/ucp/template.pptx
+++ b/liveries/ucp/template.pptx
@@ -58,7 +58,7 @@
             <a:cxnLst/>
             <a:rect l="0" t="0" r="r" b="b"/>
             <a:pathLst>
-              <a:path w="16000" h="9000" stroke="0">
+              <a:path w="16000" h="9000">
                 <a:moveTo>
                   <a:pt x="10979" y="0"/>
                 </a:moveTo>
@@ -117,7 +117,7 @@
             <a:cxnLst/>
             <a:rect l="0" t="0" r="r" b="b"/>
             <a:pathLst>
-              <a:path w="16000" h="9000" stroke="0">
+              <a:path w="16000" h="9000">
                 <a:moveTo>
                   <a:pt x="11421" y="0"/>
                 </a:moveTo>
@@ -1222,7 +1222,7 @@
             <a:cxnLst/>
             <a:rect l="0" t="0" r="r" b="b"/>
             <a:pathLst>
-              <a:path w="16000" h="9000" stroke="0">
+              <a:path w="16000" h="9000">
                 <a:moveTo>
                   <a:pt x="11939" y="0"/>
                 </a:moveTo>
@@ -1281,7 +1281,7 @@
             <a:cxnLst/>
             <a:rect l="0" t="0" r="r" b="b"/>
             <a:pathLst>
-              <a:path w="16000" h="9000" stroke="0">
+              <a:path w="16000" h="9000">
                 <a:moveTo>
                   <a:pt x="12381" y="0"/>
                 </a:moveTo>
@@ -2627,7 +2627,7 @@
             <a:cxnLst/>
             <a:rect l="0" t="0" r="r" b="b"/>
             <a:pathLst>
-              <a:path w="16000" h="9000" stroke="0">
+              <a:path w="16000" h="9000">
                 <a:moveTo>
                   <a:pt x="10979" y="0"/>
                 </a:moveTo>
@@ -2686,7 +2686,7 @@
             <a:cxnLst/>
             <a:rect l="0" t="0" r="r" b="b"/>
             <a:pathLst>
-              <a:path w="16000" h="9000" stroke="0">
+              <a:path w="16000" h="9000">
                 <a:moveTo>
                   <a:pt x="11421" y="0"/>
                 </a:moveTo>

--- a/liveries/ucp/template.pptx
+++ b/liveries/ucp/template.pptx
@@ -3715,8 +3715,8 @@
         </p:nvSpPr>
         <p:spPr>
           <a:xfrm>
-            <a:off x="0" y="252032"/>
-            <a:ext cx="164592" cy="490690"/>
+            <a:off x="0" y="251517"/>
+            <a:ext cx="164592" cy="400164"/>
           </a:xfrm>
           <a:prstGeom prst="rect">
             <a:avLst/>
@@ -3764,8 +3764,8 @@
         </p:nvSpPr>
         <p:spPr>
           <a:xfrm>
-            <a:off x="548640" y="252032"/>
-            <a:ext cx="6904225" cy="490690"/>
+            <a:off x="548640" y="251517"/>
+            <a:ext cx="6904225" cy="400164"/>
           </a:xfrm>
           <a:prstGeom prst="rect">
             <a:avLst/>

--- a/liveries/ucp/template.pptx
+++ b/liveries/ucp/template.pptx
@@ -3743,11 +3743,9 @@
           <a:prstGeom prst="line">
             <a:avLst/>
           </a:prstGeom>
-          <a:ln w="9525">
+          <a:ln w="8230">
             <a:solidFill>
-              <a:schemeClr val="tx1">
-                <a:alpha val="30000"/>
-              </a:schemeClr>
+              <a:srgbClr val="A9B8CB"/>
             </a:solidFill>
           </a:ln>
         </p:spPr>

--- a/liveries/ucp/template.pptx
+++ b/liveries/ucp/template.pptx
@@ -362,7 +362,7 @@
                 <a:spcPts val="0"/>
               </a:spcBef>
               <a:buNone/>
-              <a:defRPr sz="800" b="1" cap="all">
+              <a:defRPr sz="800" b="1" cap="all" spc="64">
                 <a:solidFill>
                   <a:srgbClr val="011837"/>
                 </a:solidFill>
@@ -3348,7 +3348,7 @@
                 <a:spcPts val="0"/>
               </a:spcBef>
               <a:buNone/>
-              <a:defRPr sz="800" b="1" cap="all">
+              <a:defRPr sz="800" b="1" cap="all" spc="64">
                 <a:solidFill>
                   <a:srgbClr val="00357A"/>
                 </a:solidFill>

--- a/liveries/ucp/template.pptx
+++ b/liveries/ucp/template.pptx
@@ -362,7 +362,7 @@
                 <a:spcPts val="0"/>
               </a:spcBef>
               <a:buNone/>
-              <a:defRPr sz="800" b="1" cap="all">
+              <a:defRPr sz="800" b="1" cap="all" spc="64">
                 <a:solidFill>
                   <a:srgbClr val="011837"/>
                 </a:solidFill>
@@ -3348,7 +3348,7 @@
                 <a:spcPts val="0"/>
               </a:spcBef>
               <a:buNone/>
-              <a:defRPr sz="800" b="1" cap="all">
+              <a:defRPr sz="800" b="1" cap="all" spc="64">
                 <a:solidFill>
                   <a:srgbClr val="00357A"/>
                 </a:solidFill>
@@ -3715,8 +3715,8 @@
         </p:nvSpPr>
         <p:spPr>
           <a:xfrm>
-            <a:off x="0" y="252032"/>
-            <a:ext cx="164592" cy="490690"/>
+            <a:off x="0" y="251517"/>
+            <a:ext cx="164592" cy="400164"/>
           </a:xfrm>
           <a:prstGeom prst="rect">
             <a:avLst/>
@@ -3743,11 +3743,9 @@
           <a:prstGeom prst="line">
             <a:avLst/>
           </a:prstGeom>
-          <a:ln w="9525">
+          <a:ln w="8230">
             <a:solidFill>
-              <a:schemeClr val="tx1">
-                <a:alpha val="30000"/>
-              </a:schemeClr>
+              <a:srgbClr val="A9B8CB"/>
             </a:solidFill>
           </a:ln>
         </p:spPr>
@@ -3764,8 +3762,8 @@
         </p:nvSpPr>
         <p:spPr>
           <a:xfrm>
-            <a:off x="548640" y="252032"/>
-            <a:ext cx="6904225" cy="490690"/>
+            <a:off x="548640" y="251517"/>
+            <a:ext cx="6904225" cy="400164"/>
           </a:xfrm>
           <a:prstGeom prst="rect">
             <a:avLst/>
